--- a/Lecture Slides/08 - Compiling Multi-File Projects.pptx
+++ b/Lecture Slides/08 - Compiling Multi-File Projects.pptx
@@ -4,6 +4,9 @@
   <p:sldMasterIdLst>
     <p:sldMasterId id="2147483648" r:id="rId1"/>
   </p:sldMasterIdLst>
+  <p:notesMasterIdLst>
+    <p:notesMasterId r:id="rId22"/>
+  </p:notesMasterIdLst>
   <p:sldIdLst>
     <p:sldId id="256" r:id="rId2"/>
     <p:sldId id="257" r:id="rId3"/>
@@ -52,6 +55,596 @@
 </p:presentation>
 </file>
 
+<file path=ppt/notesMasters/notesMaster1.xml><?xml version="1.0" encoding="utf-8"?>
+<p:notesMaster xmlns:a="http://schemas.openxmlformats.org/drawingml/2006/main" xmlns:r="http://schemas.openxmlformats.org/officeDocument/2006/relationships" xmlns:p="http://schemas.openxmlformats.org/presentationml/2006/main">
+  <p:cSld>
+    <p:bg>
+      <p:bgRef idx="1001">
+        <a:schemeClr val="bg1"/>
+      </p:bgRef>
+    </p:bg>
+    <p:spTree>
+      <p:nvGrpSpPr>
+        <p:cNvPr id="1" name=""/>
+        <p:cNvGrpSpPr/>
+        <p:nvPr/>
+      </p:nvGrpSpPr>
+      <p:grpSpPr>
+        <a:xfrm>
+          <a:off x="0" y="0"/>
+          <a:ext cx="0" cy="0"/>
+          <a:chOff x="0" y="0"/>
+          <a:chExt cx="0" cy="0"/>
+        </a:xfrm>
+      </p:grpSpPr>
+      <p:sp>
+        <p:nvSpPr>
+          <p:cNvPr id="2" name="Header Placeholder 1"/>
+          <p:cNvSpPr>
+            <a:spLocks noGrp="1"/>
+          </p:cNvSpPr>
+          <p:nvPr>
+            <p:ph type="hdr" sz="quarter"/>
+          </p:nvPr>
+        </p:nvSpPr>
+        <p:spPr>
+          <a:xfrm>
+            <a:off x="0" y="0"/>
+            <a:ext cx="5283200" cy="344488"/>
+          </a:xfrm>
+          <a:prstGeom prst="rect">
+            <a:avLst/>
+          </a:prstGeom>
+        </p:spPr>
+        <p:txBody>
+          <a:bodyPr vert="horz" lIns="91440" tIns="45720" rIns="91440" bIns="45720" rtlCol="0"/>
+          <a:lstStyle>
+            <a:lvl1pPr algn="l">
+              <a:defRPr sz="1200"/>
+            </a:lvl1pPr>
+          </a:lstStyle>
+          <a:p>
+            <a:endParaRPr lang="en-US"/>
+          </a:p>
+        </p:txBody>
+      </p:sp>
+      <p:sp>
+        <p:nvSpPr>
+          <p:cNvPr id="3" name="Date Placeholder 2"/>
+          <p:cNvSpPr>
+            <a:spLocks noGrp="1"/>
+          </p:cNvSpPr>
+          <p:nvPr>
+            <p:ph type="dt" idx="1"/>
+          </p:nvPr>
+        </p:nvSpPr>
+        <p:spPr>
+          <a:xfrm>
+            <a:off x="6905625" y="0"/>
+            <a:ext cx="5283200" cy="344488"/>
+          </a:xfrm>
+          <a:prstGeom prst="rect">
+            <a:avLst/>
+          </a:prstGeom>
+        </p:spPr>
+        <p:txBody>
+          <a:bodyPr vert="horz" lIns="91440" tIns="45720" rIns="91440" bIns="45720" rtlCol="0"/>
+          <a:lstStyle>
+            <a:lvl1pPr algn="r">
+              <a:defRPr sz="1200"/>
+            </a:lvl1pPr>
+          </a:lstStyle>
+          <a:p>
+            <a:fld id="{5703F5A1-882B-40A6-B6D3-E0E43A564F27}" type="datetimeFigureOut">
+              <a:rPr lang="en-US" smtClean="0"/>
+              <a:t>2/11/2026</a:t>
+            </a:fld>
+            <a:endParaRPr lang="en-US"/>
+          </a:p>
+        </p:txBody>
+      </p:sp>
+      <p:sp>
+        <p:nvSpPr>
+          <p:cNvPr id="4" name="Slide Image Placeholder 3"/>
+          <p:cNvSpPr>
+            <a:spLocks noGrp="1" noRot="1" noChangeAspect="1"/>
+          </p:cNvSpPr>
+          <p:nvPr>
+            <p:ph type="sldImg" idx="2"/>
+          </p:nvPr>
+        </p:nvSpPr>
+        <p:spPr>
+          <a:xfrm>
+            <a:off x="4038600" y="857250"/>
+            <a:ext cx="4114800" cy="2314575"/>
+          </a:xfrm>
+          <a:prstGeom prst="rect">
+            <a:avLst/>
+          </a:prstGeom>
+          <a:noFill/>
+          <a:ln w="12700">
+            <a:solidFill>
+              <a:prstClr val="black"/>
+            </a:solidFill>
+          </a:ln>
+        </p:spPr>
+        <p:txBody>
+          <a:bodyPr vert="horz" lIns="91440" tIns="45720" rIns="91440" bIns="45720" rtlCol="0" anchor="ctr"/>
+          <a:lstStyle/>
+          <a:p>
+            <a:endParaRPr lang="en-US"/>
+          </a:p>
+        </p:txBody>
+      </p:sp>
+      <p:sp>
+        <p:nvSpPr>
+          <p:cNvPr id="5" name="Notes Placeholder 4"/>
+          <p:cNvSpPr>
+            <a:spLocks noGrp="1"/>
+          </p:cNvSpPr>
+          <p:nvPr>
+            <p:ph type="body" sz="quarter" idx="3"/>
+          </p:nvPr>
+        </p:nvSpPr>
+        <p:spPr>
+          <a:xfrm>
+            <a:off x="1219200" y="3300413"/>
+            <a:ext cx="9753600" cy="2700337"/>
+          </a:xfrm>
+          <a:prstGeom prst="rect">
+            <a:avLst/>
+          </a:prstGeom>
+        </p:spPr>
+        <p:txBody>
+          <a:bodyPr vert="horz" lIns="91440" tIns="45720" rIns="91440" bIns="45720" rtlCol="0"/>
+          <a:lstStyle/>
+          <a:p>
+            <a:pPr lvl="0"/>
+            <a:r>
+              <a:rPr lang="en-US"/>
+              <a:t>Click to edit Master text styles</a:t>
+            </a:r>
+          </a:p>
+          <a:p>
+            <a:pPr lvl="1"/>
+            <a:r>
+              <a:rPr lang="en-US"/>
+              <a:t>Second level</a:t>
+            </a:r>
+          </a:p>
+          <a:p>
+            <a:pPr lvl="2"/>
+            <a:r>
+              <a:rPr lang="en-US"/>
+              <a:t>Third level</a:t>
+            </a:r>
+          </a:p>
+          <a:p>
+            <a:pPr lvl="3"/>
+            <a:r>
+              <a:rPr lang="en-US"/>
+              <a:t>Fourth level</a:t>
+            </a:r>
+          </a:p>
+          <a:p>
+            <a:pPr lvl="4"/>
+            <a:r>
+              <a:rPr lang="en-US"/>
+              <a:t>Fifth level</a:t>
+            </a:r>
+          </a:p>
+        </p:txBody>
+      </p:sp>
+      <p:sp>
+        <p:nvSpPr>
+          <p:cNvPr id="6" name="Footer Placeholder 5"/>
+          <p:cNvSpPr>
+            <a:spLocks noGrp="1"/>
+          </p:cNvSpPr>
+          <p:nvPr>
+            <p:ph type="ftr" sz="quarter" idx="4"/>
+          </p:nvPr>
+        </p:nvSpPr>
+        <p:spPr>
+          <a:xfrm>
+            <a:off x="0" y="6513513"/>
+            <a:ext cx="5283200" cy="344487"/>
+          </a:xfrm>
+          <a:prstGeom prst="rect">
+            <a:avLst/>
+          </a:prstGeom>
+        </p:spPr>
+        <p:txBody>
+          <a:bodyPr vert="horz" lIns="91440" tIns="45720" rIns="91440" bIns="45720" rtlCol="0" anchor="b"/>
+          <a:lstStyle>
+            <a:lvl1pPr algn="l">
+              <a:defRPr sz="1200"/>
+            </a:lvl1pPr>
+          </a:lstStyle>
+          <a:p>
+            <a:endParaRPr lang="en-US"/>
+          </a:p>
+        </p:txBody>
+      </p:sp>
+      <p:sp>
+        <p:nvSpPr>
+          <p:cNvPr id="7" name="Slide Number Placeholder 6"/>
+          <p:cNvSpPr>
+            <a:spLocks noGrp="1"/>
+          </p:cNvSpPr>
+          <p:nvPr>
+            <p:ph type="sldNum" sz="quarter" idx="5"/>
+          </p:nvPr>
+        </p:nvSpPr>
+        <p:spPr>
+          <a:xfrm>
+            <a:off x="6905625" y="6513513"/>
+            <a:ext cx="5283200" cy="344487"/>
+          </a:xfrm>
+          <a:prstGeom prst="rect">
+            <a:avLst/>
+          </a:prstGeom>
+        </p:spPr>
+        <p:txBody>
+          <a:bodyPr vert="horz" lIns="91440" tIns="45720" rIns="91440" bIns="45720" rtlCol="0" anchor="b"/>
+          <a:lstStyle>
+            <a:lvl1pPr algn="r">
+              <a:defRPr sz="1200"/>
+            </a:lvl1pPr>
+          </a:lstStyle>
+          <a:p>
+            <a:fld id="{2A1A816F-5AFA-4275-9CBC-D000E2066A1A}" type="slidenum">
+              <a:rPr lang="en-US" smtClean="0"/>
+              <a:t>‹#›</a:t>
+            </a:fld>
+            <a:endParaRPr lang="en-US"/>
+          </a:p>
+        </p:txBody>
+      </p:sp>
+    </p:spTree>
+    <p:extLst>
+      <p:ext uri="{BB962C8B-B14F-4D97-AF65-F5344CB8AC3E}">
+        <p14:creationId xmlns:p14="http://schemas.microsoft.com/office/powerpoint/2010/main" val="107708880"/>
+      </p:ext>
+    </p:extLst>
+  </p:cSld>
+  <p:clrMap bg1="lt1" tx1="dk1" bg2="lt2" tx2="dk2" accent1="accent1" accent2="accent2" accent3="accent3" accent4="accent4" accent5="accent5" accent6="accent6" hlink="hlink" folHlink="folHlink"/>
+  <p:notesStyle>
+    <a:lvl1pPr marL="0" algn="l" defTabSz="914400" rtl="0" eaLnBrk="1" latinLnBrk="0" hangingPunct="1">
+      <a:defRPr sz="1200" kern="1200">
+        <a:solidFill>
+          <a:schemeClr val="tx1"/>
+        </a:solidFill>
+        <a:latin typeface="+mn-lt"/>
+        <a:ea typeface="+mn-ea"/>
+        <a:cs typeface="+mn-cs"/>
+      </a:defRPr>
+    </a:lvl1pPr>
+    <a:lvl2pPr marL="457200" algn="l" defTabSz="914400" rtl="0" eaLnBrk="1" latinLnBrk="0" hangingPunct="1">
+      <a:defRPr sz="1200" kern="1200">
+        <a:solidFill>
+          <a:schemeClr val="tx1"/>
+        </a:solidFill>
+        <a:latin typeface="+mn-lt"/>
+        <a:ea typeface="+mn-ea"/>
+        <a:cs typeface="+mn-cs"/>
+      </a:defRPr>
+    </a:lvl2pPr>
+    <a:lvl3pPr marL="914400" algn="l" defTabSz="914400" rtl="0" eaLnBrk="1" latinLnBrk="0" hangingPunct="1">
+      <a:defRPr sz="1200" kern="1200">
+        <a:solidFill>
+          <a:schemeClr val="tx1"/>
+        </a:solidFill>
+        <a:latin typeface="+mn-lt"/>
+        <a:ea typeface="+mn-ea"/>
+        <a:cs typeface="+mn-cs"/>
+      </a:defRPr>
+    </a:lvl3pPr>
+    <a:lvl4pPr marL="1371600" algn="l" defTabSz="914400" rtl="0" eaLnBrk="1" latinLnBrk="0" hangingPunct="1">
+      <a:defRPr sz="1200" kern="1200">
+        <a:solidFill>
+          <a:schemeClr val="tx1"/>
+        </a:solidFill>
+        <a:latin typeface="+mn-lt"/>
+        <a:ea typeface="+mn-ea"/>
+        <a:cs typeface="+mn-cs"/>
+      </a:defRPr>
+    </a:lvl4pPr>
+    <a:lvl5pPr marL="1828800" algn="l" defTabSz="914400" rtl="0" eaLnBrk="1" latinLnBrk="0" hangingPunct="1">
+      <a:defRPr sz="1200" kern="1200">
+        <a:solidFill>
+          <a:schemeClr val="tx1"/>
+        </a:solidFill>
+        <a:latin typeface="+mn-lt"/>
+        <a:ea typeface="+mn-ea"/>
+        <a:cs typeface="+mn-cs"/>
+      </a:defRPr>
+    </a:lvl5pPr>
+    <a:lvl6pPr marL="2286000" algn="l" defTabSz="914400" rtl="0" eaLnBrk="1" latinLnBrk="0" hangingPunct="1">
+      <a:defRPr sz="1200" kern="1200">
+        <a:solidFill>
+          <a:schemeClr val="tx1"/>
+        </a:solidFill>
+        <a:latin typeface="+mn-lt"/>
+        <a:ea typeface="+mn-ea"/>
+        <a:cs typeface="+mn-cs"/>
+      </a:defRPr>
+    </a:lvl6pPr>
+    <a:lvl7pPr marL="2743200" algn="l" defTabSz="914400" rtl="0" eaLnBrk="1" latinLnBrk="0" hangingPunct="1">
+      <a:defRPr sz="1200" kern="1200">
+        <a:solidFill>
+          <a:schemeClr val="tx1"/>
+        </a:solidFill>
+        <a:latin typeface="+mn-lt"/>
+        <a:ea typeface="+mn-ea"/>
+        <a:cs typeface="+mn-cs"/>
+      </a:defRPr>
+    </a:lvl7pPr>
+    <a:lvl8pPr marL="3200400" algn="l" defTabSz="914400" rtl="0" eaLnBrk="1" latinLnBrk="0" hangingPunct="1">
+      <a:defRPr sz="1200" kern="1200">
+        <a:solidFill>
+          <a:schemeClr val="tx1"/>
+        </a:solidFill>
+        <a:latin typeface="+mn-lt"/>
+        <a:ea typeface="+mn-ea"/>
+        <a:cs typeface="+mn-cs"/>
+      </a:defRPr>
+    </a:lvl8pPr>
+    <a:lvl9pPr marL="3657600" algn="l" defTabSz="914400" rtl="0" eaLnBrk="1" latinLnBrk="0" hangingPunct="1">
+      <a:defRPr sz="1200" kern="1200">
+        <a:solidFill>
+          <a:schemeClr val="tx1"/>
+        </a:solidFill>
+        <a:latin typeface="+mn-lt"/>
+        <a:ea typeface="+mn-ea"/>
+        <a:cs typeface="+mn-cs"/>
+      </a:defRPr>
+    </a:lvl9pPr>
+  </p:notesStyle>
+</p:notesMaster>
+</file>
+
+<file path=ppt/notesSlides/notesSlide1.xml><?xml version="1.0" encoding="utf-8"?>
+<p:notes xmlns:a="http://schemas.openxmlformats.org/drawingml/2006/main" xmlns:r="http://schemas.openxmlformats.org/officeDocument/2006/relationships" xmlns:p="http://schemas.openxmlformats.org/presentationml/2006/main">
+  <p:cSld>
+    <p:spTree>
+      <p:nvGrpSpPr>
+        <p:cNvPr id="1" name=""/>
+        <p:cNvGrpSpPr/>
+        <p:nvPr/>
+      </p:nvGrpSpPr>
+      <p:grpSpPr>
+        <a:xfrm>
+          <a:off x="0" y="0"/>
+          <a:ext cx="0" cy="0"/>
+          <a:chOff x="0" y="0"/>
+          <a:chExt cx="0" cy="0"/>
+        </a:xfrm>
+      </p:grpSpPr>
+      <p:sp>
+        <p:nvSpPr>
+          <p:cNvPr id="2" name="Slide Image Placeholder 1"/>
+          <p:cNvSpPr>
+            <a:spLocks noGrp="1" noRot="1" noChangeAspect="1"/>
+          </p:cNvSpPr>
+          <p:nvPr>
+            <p:ph type="sldImg"/>
+          </p:nvPr>
+        </p:nvSpPr>
+        <p:spPr/>
+      </p:sp>
+      <p:sp>
+        <p:nvSpPr>
+          <p:cNvPr id="3" name="Notes Placeholder 2"/>
+          <p:cNvSpPr>
+            <a:spLocks noGrp="1"/>
+          </p:cNvSpPr>
+          <p:nvPr>
+            <p:ph type="body" idx="1"/>
+          </p:nvPr>
+        </p:nvSpPr>
+        <p:spPr/>
+        <p:txBody>
+          <a:bodyPr/>
+          <a:lstStyle/>
+          <a:p>
+            <a:endParaRPr lang="en-US" dirty="0"/>
+          </a:p>
+          <a:p>
+            <a:endParaRPr lang="en-US" dirty="0"/>
+          </a:p>
+          <a:p>
+            <a:r>
+              <a:rPr lang="en-US" dirty="0"/>
+              <a:t>---</a:t>
+            </a:r>
+          </a:p>
+          <a:p>
+            <a:r>
+              <a:rPr lang="en-US" i="1" u="sng" dirty="0"/>
+              <a:t>For reference:</a:t>
+            </a:r>
+          </a:p>
+          <a:p>
+            <a:r>
+              <a:rPr lang="en-US" dirty="0"/>
+              <a:t>The </a:t>
+            </a:r>
+            <a:r>
+              <a:rPr lang="en-US" sz="1200" b="1" i="0" kern="1200" dirty="0">
+                <a:solidFill>
+                  <a:schemeClr val="tx1"/>
+                </a:solidFill>
+                <a:effectLst/>
+                <a:latin typeface="+mn-lt"/>
+                <a:ea typeface="+mn-ea"/>
+                <a:cs typeface="+mn-cs"/>
+              </a:rPr>
+              <a:t>.</a:t>
+            </a:r>
+            <a:r>
+              <a:rPr lang="en-US" sz="1200" b="1" i="0" kern="1200" dirty="0" err="1">
+                <a:solidFill>
+                  <a:schemeClr val="tx1"/>
+                </a:solidFill>
+                <a:effectLst/>
+                <a:latin typeface="+mn-lt"/>
+                <a:ea typeface="+mn-ea"/>
+                <a:cs typeface="+mn-cs"/>
+              </a:rPr>
+              <a:t>bss</a:t>
+            </a:r>
+            <a:r>
+              <a:rPr lang="en-US" sz="1200" b="1" i="0" kern="1200" dirty="0">
+                <a:solidFill>
+                  <a:schemeClr val="tx1"/>
+                </a:solidFill>
+                <a:effectLst/>
+                <a:latin typeface="+mn-lt"/>
+                <a:ea typeface="+mn-ea"/>
+                <a:cs typeface="+mn-cs"/>
+              </a:rPr>
+              <a:t> section</a:t>
+            </a:r>
+            <a:r>
+              <a:rPr lang="en-US" sz="1200" b="0" i="0" kern="1200" dirty="0">
+                <a:solidFill>
+                  <a:schemeClr val="tx1"/>
+                </a:solidFill>
+                <a:effectLst/>
+                <a:latin typeface="+mn-lt"/>
+                <a:ea typeface="+mn-ea"/>
+                <a:cs typeface="+mn-cs"/>
+              </a:rPr>
+              <a:t> (short for "Block Started by Symbol" or "Block Storage Start") </a:t>
+            </a:r>
+          </a:p>
+          <a:p>
+            <a:r>
+              <a:rPr lang="en-US" sz="1200" b="0" i="0" kern="1200" dirty="0">
+                <a:solidFill>
+                  <a:schemeClr val="tx1"/>
+                </a:solidFill>
+                <a:effectLst/>
+                <a:latin typeface="+mn-lt"/>
+                <a:ea typeface="+mn-ea"/>
+                <a:cs typeface="+mn-cs"/>
+              </a:rPr>
+              <a:t>in an object file is </a:t>
+            </a:r>
+            <a:r>
+              <a:rPr lang="en-US" dirty="0"/>
+              <a:t>used to store statically allocated variables that are </a:t>
+            </a:r>
+            <a:r>
+              <a:rPr lang="en-US" b="1" dirty="0">
+                <a:effectLst/>
+              </a:rPr>
+              <a:t>uninitialized</a:t>
+            </a:r>
+            <a:r>
+              <a:rPr lang="en-US" dirty="0"/>
+              <a:t> or explicitly initialized to zero</a:t>
+            </a:r>
+            <a:r>
+              <a:rPr lang="en-US" sz="1200" b="0" i="0" kern="1200" dirty="0">
+                <a:solidFill>
+                  <a:schemeClr val="tx1"/>
+                </a:solidFill>
+                <a:effectLst/>
+                <a:latin typeface="+mn-lt"/>
+                <a:ea typeface="+mn-ea"/>
+                <a:cs typeface="+mn-cs"/>
+              </a:rPr>
+              <a:t>.</a:t>
+            </a:r>
+          </a:p>
+          <a:p>
+            <a:endParaRPr lang="en-US" dirty="0"/>
+          </a:p>
+          <a:p>
+            <a:r>
+              <a:rPr lang="en-US" sz="1200" b="0" i="0" kern="1200" dirty="0">
+                <a:solidFill>
+                  <a:schemeClr val="tx1"/>
+                </a:solidFill>
+                <a:effectLst/>
+                <a:latin typeface="+mn-lt"/>
+                <a:ea typeface="+mn-ea"/>
+                <a:cs typeface="+mn-cs"/>
+              </a:rPr>
+              <a:t>The </a:t>
+            </a:r>
+            <a:r>
+              <a:rPr lang="en-US" sz="1200" b="1" i="0" kern="1200" dirty="0">
+                <a:solidFill>
+                  <a:schemeClr val="tx1"/>
+                </a:solidFill>
+                <a:effectLst/>
+                <a:latin typeface="+mn-lt"/>
+                <a:ea typeface="+mn-ea"/>
+                <a:cs typeface="+mn-cs"/>
+              </a:rPr>
+              <a:t>.data section</a:t>
+            </a:r>
+            <a:r>
+              <a:rPr lang="en-US" sz="1200" b="0" i="0" kern="1200" dirty="0">
+                <a:solidFill>
+                  <a:schemeClr val="tx1"/>
+                </a:solidFill>
+                <a:effectLst/>
+                <a:latin typeface="+mn-lt"/>
+                <a:ea typeface="+mn-ea"/>
+                <a:cs typeface="+mn-cs"/>
+              </a:rPr>
+              <a:t> </a:t>
+            </a:r>
+            <a:r>
+              <a:rPr lang="en-US" dirty="0"/>
+              <a:t>holds initialized, non-zero global/static variables and occupies space in the binary file.</a:t>
+            </a:r>
+          </a:p>
+          <a:p>
+            <a:endParaRPr lang="en-US" dirty="0"/>
+          </a:p>
+        </p:txBody>
+      </p:sp>
+      <p:sp>
+        <p:nvSpPr>
+          <p:cNvPr id="4" name="Slide Number Placeholder 3"/>
+          <p:cNvSpPr>
+            <a:spLocks noGrp="1"/>
+          </p:cNvSpPr>
+          <p:nvPr>
+            <p:ph type="sldNum" sz="quarter" idx="5"/>
+          </p:nvPr>
+        </p:nvSpPr>
+        <p:spPr/>
+        <p:txBody>
+          <a:bodyPr/>
+          <a:lstStyle/>
+          <a:p>
+            <a:fld id="{2A1A816F-5AFA-4275-9CBC-D000E2066A1A}" type="slidenum">
+              <a:rPr lang="en-US" smtClean="0"/>
+              <a:t>7</a:t>
+            </a:fld>
+            <a:endParaRPr lang="en-US"/>
+          </a:p>
+        </p:txBody>
+      </p:sp>
+    </p:spTree>
+    <p:extLst>
+      <p:ext uri="{BB962C8B-B14F-4D97-AF65-F5344CB8AC3E}">
+        <p14:creationId xmlns:p14="http://schemas.microsoft.com/office/powerpoint/2010/main" val="4106550770"/>
+      </p:ext>
+    </p:extLst>
+  </p:cSld>
+  <p:clrMapOvr>
+    <a:masterClrMapping/>
+  </p:clrMapOvr>
+</p:notes>
+</file>
+
 <file path=ppt/slideLayouts/slideLayout1.xml><?xml version="1.0" encoding="utf-8"?>
 <p:sldLayout xmlns:a="http://schemas.openxmlformats.org/drawingml/2006/main" xmlns:r="http://schemas.openxmlformats.org/officeDocument/2006/relationships" xmlns:p="http://schemas.openxmlformats.org/presentationml/2006/main" type="obj" preserve="1">
   <p:cSld name="Title Slide">
@@ -203,7 +796,7 @@
           <a:p>
             <a:fld id="{1D8BD707-D9CF-40AE-B4C6-C98DA3205C09}" type="datetimeFigureOut">
               <a:rPr lang="en-US"/>
-              <a:t>2/10/2026</a:t>
+              <a:t>2/11/2026</a:t>
             </a:fld>
             <a:endParaRPr lang="en-US"/>
           </a:p>
@@ -380,7 +973,7 @@
           <a:p>
             <a:fld id="{1D8BD707-D9CF-40AE-B4C6-C98DA3205C09}" type="datetimeFigureOut">
               <a:rPr lang="en-US"/>
-              <a:t>2/10/2026</a:t>
+              <a:t>2/11/2026</a:t>
             </a:fld>
             <a:endParaRPr lang="en-US"/>
           </a:p>
@@ -594,7 +1187,7 @@
           <a:p>
             <a:fld id="{1D8BD707-D9CF-40AE-B4C6-C98DA3205C09}" type="datetimeFigureOut">
               <a:rPr lang="en-US"/>
-              <a:t>2/10/2026</a:t>
+              <a:t>2/11/2026</a:t>
             </a:fld>
             <a:endParaRPr lang="en-US"/>
           </a:p>
@@ -742,7 +1335,7 @@
           <a:p>
             <a:fld id="{1D8BD707-D9CF-40AE-B4C6-C98DA3205C09}" type="datetimeFigureOut">
               <a:rPr lang="en-US"/>
-              <a:t>2/10/2026</a:t>
+              <a:t>2/11/2026</a:t>
             </a:fld>
             <a:endParaRPr lang="en-US"/>
           </a:p>
@@ -861,7 +1454,7 @@
           <a:p>
             <a:fld id="{1D8BD707-D9CF-40AE-B4C6-C98DA3205C09}" type="datetimeFigureOut">
               <a:rPr lang="en-US"/>
-              <a:t>2/10/2026</a:t>
+              <a:t>2/11/2026</a:t>
             </a:fld>
             <a:endParaRPr lang="en-US"/>
           </a:p>
@@ -1108,7 +1701,7 @@
           <a:p>
             <a:fld id="{1D8BD707-D9CF-40AE-B4C6-C98DA3205C09}" type="datetimeFigureOut">
               <a:rPr lang="en-US"/>
-              <a:t>2/10/2026</a:t>
+              <a:t>2/11/2026</a:t>
             </a:fld>
             <a:endParaRPr lang="en-US"/>
           </a:p>
@@ -5243,7 +5836,7 @@
         <p:spPr>
           <a:xfrm>
             <a:off x="5811299" y="3784600"/>
-            <a:ext cx="5812155" cy="635000"/>
+            <a:ext cx="5812155" cy="702693"/>
           </a:xfrm>
           <a:prstGeom prst="rect">
             <a:avLst/>
@@ -5257,7 +5850,7 @@
           <a:p>
             <a:pPr marL="12700" marR="5080">
               <a:lnSpc>
-                <a:spcPct val="100000"/>
+                <a:spcPct val="114000"/>
               </a:lnSpc>
               <a:spcBef>
                 <a:spcPts val="100"/>
@@ -6520,7 +7113,7 @@
               <a:t> </a:t>
             </a:r>
             <a:r>
-              <a:rPr sz="1700" dirty="0">
+              <a:rPr sz="1700" u="sng" dirty="0">
                 <a:latin typeface="Arial MT"/>
                 <a:cs typeface="Arial MT"/>
               </a:rPr>
@@ -6676,7 +7269,7 @@
               <a:t> </a:t>
             </a:r>
             <a:r>
-              <a:rPr sz="1700" dirty="0">
+              <a:rPr sz="1700" u="sng" dirty="0">
                 <a:latin typeface="Arial MT"/>
                 <a:cs typeface="Arial MT"/>
               </a:rPr>
@@ -10299,7 +10892,7 @@
         <p:spPr>
           <a:xfrm>
             <a:off x="1692374" y="1935725"/>
-            <a:ext cx="8694420" cy="3705860"/>
+            <a:ext cx="8694420" cy="3104376"/>
           </a:xfrm>
           <a:prstGeom prst="rect">
             <a:avLst/>
@@ -10346,7 +10939,7 @@
           <a:p>
             <a:pPr marL="160020" marR="158115" algn="ctr">
               <a:lnSpc>
-                <a:spcPct val="100000"/>
+                <a:spcPct val="114000"/>
               </a:lnSpc>
             </a:pPr>
             <a:r>
@@ -15268,7 +15861,7 @@
               </a:rPr>
               <a:t>directives</a:t>
             </a:r>
-            <a:endParaRPr sz="1800">
+            <a:endParaRPr sz="1800" dirty="0">
               <a:latin typeface="Arial MT"/>
               <a:cs typeface="Arial MT"/>
             </a:endParaRPr>
@@ -15376,7 +15969,7 @@
               </a:rPr>
               <a:t>#undef</a:t>
             </a:r>
-            <a:endParaRPr sz="1800">
+            <a:endParaRPr sz="1800" dirty="0">
               <a:latin typeface="Arial MT"/>
               <a:cs typeface="Arial MT"/>
             </a:endParaRPr>
@@ -15424,7 +16017,7 @@
               </a:rPr>
               <a:t>Inclusion</a:t>
             </a:r>
-            <a:endParaRPr sz="1800">
+            <a:endParaRPr sz="1800" dirty="0">
               <a:latin typeface="Arial MT"/>
               <a:cs typeface="Arial MT"/>
             </a:endParaRPr>
@@ -15472,7 +16065,7 @@
               </a:rPr>
               <a:t>header.h</a:t>
             </a:r>
-            <a:endParaRPr sz="1800">
+            <a:endParaRPr sz="1800" dirty="0">
               <a:latin typeface="Arial MT"/>
               <a:cs typeface="Arial MT"/>
             </a:endParaRPr>
@@ -15576,7 +16169,7 @@
               </a:rPr>
               <a:t>today</a:t>
             </a:r>
-            <a:endParaRPr sz="2500">
+            <a:endParaRPr sz="2500" dirty="0">
               <a:latin typeface="Georgia"/>
               <a:cs typeface="Georgia"/>
             </a:endParaRPr>
@@ -15654,7 +16247,7 @@
               </a:rPr>
               <a:t>Projects</a:t>
             </a:r>
-            <a:endParaRPr sz="1800">
+            <a:endParaRPr sz="1800" dirty="0">
               <a:latin typeface="Arial MT"/>
               <a:cs typeface="Arial MT"/>
             </a:endParaRPr>
@@ -15702,7 +16295,7 @@
               </a:rPr>
               <a:t>Tracking</a:t>
             </a:r>
-            <a:endParaRPr sz="1800">
+            <a:endParaRPr sz="1800" dirty="0">
               <a:latin typeface="Arial MT"/>
               <a:cs typeface="Arial MT"/>
             </a:endParaRPr>
@@ -15730,7 +16323,7 @@
               </a:rPr>
               <a:t>Makefiles</a:t>
             </a:r>
-            <a:endParaRPr sz="1800">
+            <a:endParaRPr sz="1800" dirty="0">
               <a:latin typeface="Arial MT"/>
               <a:cs typeface="Arial MT"/>
             </a:endParaRPr>
@@ -15758,7 +16351,7 @@
               </a:rPr>
               <a:t>Structure</a:t>
             </a:r>
-            <a:endParaRPr sz="1800">
+            <a:endParaRPr sz="1800" dirty="0">
               <a:latin typeface="Arial MT"/>
               <a:cs typeface="Arial MT"/>
             </a:endParaRPr>
@@ -15806,7 +16399,7 @@
               </a:rPr>
               <a:t>Targets</a:t>
             </a:r>
-            <a:endParaRPr sz="1800">
+            <a:endParaRPr sz="1800" dirty="0">
               <a:latin typeface="Arial MT"/>
               <a:cs typeface="Arial MT"/>
             </a:endParaRPr>
@@ -15894,7 +16487,7 @@
               </a:rPr>
               <a:t>Rules</a:t>
             </a:r>
-            <a:endParaRPr sz="1800">
+            <a:endParaRPr sz="1800" dirty="0">
               <a:latin typeface="Arial MT"/>
               <a:cs typeface="Arial MT"/>
             </a:endParaRPr>
@@ -18815,8 +19408,8 @@
         </p:nvSpPr>
         <p:spPr>
           <a:xfrm>
-            <a:off x="6968625" y="1338424"/>
-            <a:ext cx="4911725" cy="2865120"/>
+            <a:off x="6968625" y="1540841"/>
+            <a:ext cx="4911725" cy="2421559"/>
           </a:xfrm>
           <a:prstGeom prst="rect">
             <a:avLst/>
@@ -18909,6 +19502,9 @@
               <a:spcBef>
                 <a:spcPts val="1200"/>
               </a:spcBef>
+              <a:spcAft>
+                <a:spcPts val="600"/>
+              </a:spcAft>
               <a:buChar char="●"/>
               <a:tabLst>
                 <a:tab pos="542925" algn="l"/>
@@ -19316,7 +19912,7 @@
         <p:spPr>
           <a:xfrm>
             <a:off x="6968625" y="4435599"/>
-            <a:ext cx="4911725" cy="2201545"/>
+            <a:ext cx="4911725" cy="1690847"/>
           </a:xfrm>
           <a:prstGeom prst="rect">
             <a:avLst/>
@@ -19396,7 +19992,7 @@
               </a:rPr>
               <a:t>):</a:t>
             </a:r>
-            <a:endParaRPr sz="1800">
+            <a:endParaRPr sz="1800" dirty="0">
               <a:latin typeface="Arial"/>
               <a:cs typeface="Arial"/>
             </a:endParaRPr>
@@ -19520,7 +20116,7 @@
               <a:t> </a:t>
             </a:r>
             <a:r>
-              <a:rPr sz="1800" u="heavy" dirty="0">
+              <a:rPr sz="1800" b="1" u="heavy" dirty="0">
                 <a:uFill>
                   <a:solidFill>
                     <a:srgbClr val="000000"/>
@@ -19532,7 +20128,7 @@
               <a:t>actual</a:t>
             </a:r>
             <a:r>
-              <a:rPr sz="1800" u="heavy" spc="-25" dirty="0">
+              <a:rPr sz="1800" b="1" u="heavy" spc="-25" dirty="0">
                 <a:uFill>
                   <a:solidFill>
                     <a:srgbClr val="000000"/>
@@ -19544,7 +20140,7 @@
               <a:t> </a:t>
             </a:r>
             <a:r>
-              <a:rPr sz="1800" u="heavy" dirty="0">
+              <a:rPr sz="1800" b="1" u="heavy" dirty="0">
                 <a:uFill>
                   <a:solidFill>
                     <a:srgbClr val="000000"/>
@@ -19556,6 +20152,41 @@
               <a:t>implementation</a:t>
             </a:r>
             <a:r>
+              <a:rPr sz="1800" b="1" spc="-15" dirty="0">
+                <a:latin typeface="Arial MT"/>
+                <a:cs typeface="Arial MT"/>
+              </a:rPr>
+              <a:t> </a:t>
+            </a:r>
+            <a:r>
+              <a:rPr sz="1800" spc="-25" dirty="0">
+                <a:latin typeface="Arial MT"/>
+                <a:cs typeface="Arial MT"/>
+              </a:rPr>
+              <a:t>of </a:t>
+            </a:r>
+            <a:r>
+              <a:rPr sz="1800" dirty="0">
+                <a:latin typeface="Arial MT"/>
+                <a:cs typeface="Arial MT"/>
+              </a:rPr>
+              <a:t>the</a:t>
+            </a:r>
+            <a:r>
+              <a:rPr sz="1800" spc="-25" dirty="0">
+                <a:latin typeface="Arial MT"/>
+                <a:cs typeface="Arial MT"/>
+              </a:rPr>
+              <a:t> </a:t>
+            </a:r>
+            <a:r>
+              <a:rPr sz="1800" dirty="0">
+                <a:latin typeface="Arial MT"/>
+                <a:cs typeface="Arial MT"/>
+              </a:rPr>
+              <a:t>functions</a:t>
+            </a:r>
+            <a:r>
               <a:rPr sz="1800" spc="-15" dirty="0">
                 <a:latin typeface="Arial MT"/>
                 <a:cs typeface="Arial MT"/>
@@ -19563,108 +20194,73 @@
               <a:t> </a:t>
             </a:r>
             <a:r>
+              <a:rPr sz="1800" dirty="0">
+                <a:latin typeface="Arial MT"/>
+                <a:cs typeface="Arial MT"/>
+              </a:rPr>
+              <a:t>and</a:t>
+            </a:r>
+            <a:r>
+              <a:rPr sz="1800" spc="-15" dirty="0">
+                <a:latin typeface="Arial MT"/>
+                <a:cs typeface="Arial MT"/>
+              </a:rPr>
+              <a:t> </a:t>
+            </a:r>
+            <a:r>
+              <a:rPr sz="1800" dirty="0">
+                <a:latin typeface="Arial MT"/>
+                <a:cs typeface="Arial MT"/>
+              </a:rPr>
+              <a:t>variables</a:t>
+            </a:r>
+            <a:r>
+              <a:rPr sz="1800" spc="-15" dirty="0">
+                <a:latin typeface="Arial MT"/>
+                <a:cs typeface="Arial MT"/>
+              </a:rPr>
+              <a:t> </a:t>
+            </a:r>
+            <a:r>
+              <a:rPr sz="1800" dirty="0">
+                <a:latin typeface="Arial MT"/>
+                <a:cs typeface="Arial MT"/>
+              </a:rPr>
+              <a:t>declared</a:t>
+            </a:r>
+            <a:r>
+              <a:rPr sz="1800" spc="-15" dirty="0">
+                <a:latin typeface="Arial MT"/>
+                <a:cs typeface="Arial MT"/>
+              </a:rPr>
+              <a:t> </a:t>
+            </a:r>
+            <a:r>
+              <a:rPr sz="1800" dirty="0">
+                <a:latin typeface="Arial MT"/>
+                <a:cs typeface="Arial MT"/>
+              </a:rPr>
+              <a:t>in</a:t>
+            </a:r>
+            <a:r>
+              <a:rPr sz="1800" spc="-15" dirty="0">
+                <a:latin typeface="Arial MT"/>
+                <a:cs typeface="Arial MT"/>
+              </a:rPr>
+              <a:t> </a:t>
+            </a:r>
+            <a:r>
               <a:rPr sz="1800" spc="-25" dirty="0">
                 <a:latin typeface="Arial MT"/>
                 <a:cs typeface="Arial MT"/>
               </a:rPr>
-              <a:t>of </a:t>
+              <a:t>the </a:t>
             </a:r>
             <a:r>
               <a:rPr sz="1800" dirty="0">
                 <a:latin typeface="Arial MT"/>
                 <a:cs typeface="Arial MT"/>
               </a:rPr>
-              <a:t>the</a:t>
-            </a:r>
-            <a:r>
-              <a:rPr sz="1800" spc="-25" dirty="0">
-                <a:latin typeface="Arial MT"/>
-                <a:cs typeface="Arial MT"/>
-              </a:rPr>
-              <a:t> </a:t>
-            </a:r>
-            <a:r>
-              <a:rPr sz="1800" dirty="0">
-                <a:latin typeface="Arial MT"/>
-                <a:cs typeface="Arial MT"/>
-              </a:rPr>
-              <a:t>functions</a:t>
-            </a:r>
-            <a:r>
-              <a:rPr sz="1800" spc="-15" dirty="0">
-                <a:latin typeface="Arial MT"/>
-                <a:cs typeface="Arial MT"/>
-              </a:rPr>
-              <a:t> </a:t>
-            </a:r>
-            <a:r>
-              <a:rPr sz="1800" dirty="0">
-                <a:latin typeface="Arial MT"/>
-                <a:cs typeface="Arial MT"/>
-              </a:rPr>
-              <a:t>and</a:t>
-            </a:r>
-            <a:r>
-              <a:rPr sz="1800" spc="-15" dirty="0">
-                <a:latin typeface="Arial MT"/>
-                <a:cs typeface="Arial MT"/>
-              </a:rPr>
-              <a:t> </a:t>
-            </a:r>
-            <a:r>
-              <a:rPr sz="1800" dirty="0">
-                <a:latin typeface="Arial MT"/>
-                <a:cs typeface="Arial MT"/>
-              </a:rPr>
-              <a:t>variables</a:t>
-            </a:r>
-            <a:r>
-              <a:rPr sz="1800" spc="-15" dirty="0">
-                <a:latin typeface="Arial MT"/>
-                <a:cs typeface="Arial MT"/>
-              </a:rPr>
-              <a:t> </a:t>
-            </a:r>
-            <a:r>
-              <a:rPr sz="1800" dirty="0">
-                <a:latin typeface="Arial MT"/>
-                <a:cs typeface="Arial MT"/>
-              </a:rPr>
-              <a:t>declared</a:t>
-            </a:r>
-            <a:r>
-              <a:rPr sz="1800" spc="-15" dirty="0">
-                <a:latin typeface="Arial MT"/>
-                <a:cs typeface="Arial MT"/>
-              </a:rPr>
-              <a:t> </a:t>
-            </a:r>
-            <a:r>
-              <a:rPr sz="1800" dirty="0">
-                <a:latin typeface="Arial MT"/>
-                <a:cs typeface="Arial MT"/>
-              </a:rPr>
-              <a:t>in</a:t>
-            </a:r>
-            <a:r>
-              <a:rPr sz="1800" spc="-15" dirty="0">
-                <a:latin typeface="Arial MT"/>
-                <a:cs typeface="Arial MT"/>
-              </a:rPr>
-              <a:t> </a:t>
-            </a:r>
-            <a:r>
-              <a:rPr sz="1800" spc="-25" dirty="0">
-                <a:latin typeface="Arial MT"/>
-                <a:cs typeface="Arial MT"/>
-              </a:rPr>
-              <a:t>the </a:t>
-            </a:r>
-            <a:r>
-              <a:rPr sz="1800" dirty="0">
-                <a:latin typeface="Arial MT"/>
-                <a:cs typeface="Arial MT"/>
-              </a:rPr>
               <a:t>header</a:t>
             </a:r>
             <a:r>
@@ -19681,7 +20277,7 @@
               </a:rPr>
               <a:t>files.</a:t>
             </a:r>
-            <a:endParaRPr sz="1800">
+            <a:endParaRPr sz="1800" dirty="0">
               <a:latin typeface="Arial MT"/>
               <a:cs typeface="Arial MT"/>
             </a:endParaRPr>
@@ -22845,7 +23441,7 @@
               </a:rPr>
               <a:t>hello_world.c</a:t>
             </a:r>
-            <a:endParaRPr sz="1800">
+            <a:endParaRPr sz="1800" dirty="0">
               <a:latin typeface="Arial MT"/>
               <a:cs typeface="Arial MT"/>
             </a:endParaRPr>
@@ -22946,7 +23542,7 @@
               </a:rPr>
               <a:t>hello_world.o</a:t>
             </a:r>
-            <a:endParaRPr sz="1800">
+            <a:endParaRPr sz="1800" dirty="0">
               <a:latin typeface="Arial MT"/>
               <a:cs typeface="Arial MT"/>
             </a:endParaRPr>
@@ -23702,7 +24298,7 @@
           <p:nvPr/>
         </p:nvPicPr>
         <p:blipFill>
-          <a:blip r:embed="rId2" cstate="print"/>
+          <a:blip r:embed="rId3" cstate="print"/>
           <a:stretch>
             <a:fillRect/>
           </a:stretch>
@@ -25207,7 +25803,7 @@
         <p:spPr>
           <a:xfrm>
             <a:off x="533400" y="2448212"/>
-            <a:ext cx="5594350" cy="2504788"/>
+            <a:ext cx="5594350" cy="3098220"/>
           </a:xfrm>
           <a:prstGeom prst="rect">
             <a:avLst/>
@@ -25235,70 +25831,70 @@
               </a:tabLst>
             </a:pPr>
             <a:r>
-              <a:rPr sz="1800" dirty="0">
+              <a:rPr sz="2000" dirty="0">
                 <a:latin typeface="Arial MT"/>
                 <a:cs typeface="Arial MT"/>
               </a:rPr>
               <a:t>If</a:t>
             </a:r>
             <a:r>
-              <a:rPr sz="1800" spc="-15" dirty="0">
-                <a:latin typeface="Arial MT"/>
-                <a:cs typeface="Arial MT"/>
-              </a:rPr>
-              <a:t> </a:t>
-            </a:r>
-            <a:r>
-              <a:rPr sz="1800" dirty="0">
+              <a:rPr sz="2000" spc="-15" dirty="0">
+                <a:latin typeface="Arial MT"/>
+                <a:cs typeface="Arial MT"/>
+              </a:rPr>
+              <a:t> </a:t>
+            </a:r>
+            <a:r>
+              <a:rPr sz="2000" dirty="0">
                 <a:latin typeface="Arial MT"/>
                 <a:cs typeface="Arial MT"/>
               </a:rPr>
               <a:t>a</a:t>
             </a:r>
             <a:r>
-              <a:rPr sz="1800" spc="-15" dirty="0">
-                <a:latin typeface="Arial MT"/>
-                <a:cs typeface="Arial MT"/>
-              </a:rPr>
-              <a:t> </a:t>
-            </a:r>
-            <a:r>
-              <a:rPr sz="1800" dirty="0">
+              <a:rPr sz="2000" spc="-15" dirty="0">
+                <a:latin typeface="Arial MT"/>
+                <a:cs typeface="Arial MT"/>
+              </a:rPr>
+              <a:t> </a:t>
+            </a:r>
+            <a:r>
+              <a:rPr sz="2000" dirty="0">
                 <a:latin typeface="Arial MT"/>
                 <a:cs typeface="Arial MT"/>
               </a:rPr>
               <a:t>source</a:t>
             </a:r>
             <a:r>
-              <a:rPr sz="1800" spc="-15" dirty="0">
-                <a:latin typeface="Arial MT"/>
-                <a:cs typeface="Arial MT"/>
-              </a:rPr>
-              <a:t> </a:t>
-            </a:r>
-            <a:r>
-              <a:rPr sz="1800" dirty="0">
+              <a:rPr sz="2000" spc="-15" dirty="0">
+                <a:latin typeface="Arial MT"/>
+                <a:cs typeface="Arial MT"/>
+              </a:rPr>
+              <a:t> </a:t>
+            </a:r>
+            <a:r>
+              <a:rPr sz="2000" dirty="0">
                 <a:latin typeface="Arial MT"/>
                 <a:cs typeface="Arial MT"/>
               </a:rPr>
               <a:t>file</a:t>
             </a:r>
             <a:r>
-              <a:rPr sz="1800" spc="-15" dirty="0">
-                <a:latin typeface="Arial MT"/>
-                <a:cs typeface="Arial MT"/>
-              </a:rPr>
-              <a:t> </a:t>
-            </a:r>
-            <a:r>
-              <a:rPr sz="1800" dirty="0">
+              <a:rPr sz="2000" spc="-15" dirty="0">
+                <a:latin typeface="Arial MT"/>
+                <a:cs typeface="Arial MT"/>
+              </a:rPr>
+              <a:t> </a:t>
+            </a:r>
+            <a:r>
+              <a:rPr sz="2000" dirty="0">
                 <a:latin typeface="Arial MT"/>
                 <a:cs typeface="Arial MT"/>
               </a:rPr>
               <a:t>(</a:t>
             </a:r>
             <a:r>
-              <a:rPr sz="1800" b="1" dirty="0">
+              <a:rPr sz="2000" b="1" dirty="0">
                 <a:solidFill>
                   <a:srgbClr val="188037"/>
                 </a:solidFill>
@@ -25308,77 +25904,77 @@
               <a:t>file.c</a:t>
             </a:r>
             <a:r>
-              <a:rPr sz="1800" dirty="0">
+              <a:rPr sz="2000" dirty="0">
                 <a:latin typeface="Arial MT"/>
                 <a:cs typeface="Arial MT"/>
               </a:rPr>
               <a:t>)</a:t>
             </a:r>
             <a:r>
-              <a:rPr sz="1800" spc="-10" dirty="0">
-                <a:latin typeface="Arial MT"/>
-                <a:cs typeface="Arial MT"/>
-              </a:rPr>
-              <a:t> </a:t>
-            </a:r>
-            <a:r>
-              <a:rPr sz="1800" dirty="0">
+              <a:rPr sz="2000" spc="-10" dirty="0">
+                <a:latin typeface="Arial MT"/>
+                <a:cs typeface="Arial MT"/>
+              </a:rPr>
+              <a:t> </a:t>
+            </a:r>
+            <a:r>
+              <a:rPr sz="2000" dirty="0">
                 <a:latin typeface="Arial MT"/>
                 <a:cs typeface="Arial MT"/>
               </a:rPr>
               <a:t>includes</a:t>
             </a:r>
             <a:r>
-              <a:rPr sz="1800" spc="-15" dirty="0">
-                <a:latin typeface="Arial MT"/>
-                <a:cs typeface="Arial MT"/>
-              </a:rPr>
-              <a:t> </a:t>
-            </a:r>
-            <a:r>
-              <a:rPr sz="1800" dirty="0">
+              <a:rPr sz="2000" spc="-15" dirty="0">
+                <a:latin typeface="Arial MT"/>
+                <a:cs typeface="Arial MT"/>
+              </a:rPr>
+              <a:t> </a:t>
+            </a:r>
+            <a:r>
+              <a:rPr sz="2000" dirty="0">
                 <a:latin typeface="Arial MT"/>
                 <a:cs typeface="Arial MT"/>
               </a:rPr>
               <a:t>a</a:t>
             </a:r>
             <a:r>
-              <a:rPr sz="1800" spc="-15" dirty="0">
-                <a:latin typeface="Arial MT"/>
-                <a:cs typeface="Arial MT"/>
-              </a:rPr>
-              <a:t> </a:t>
-            </a:r>
-            <a:r>
-              <a:rPr sz="1800" dirty="0">
+              <a:rPr sz="2000" spc="-15" dirty="0">
+                <a:latin typeface="Arial MT"/>
+                <a:cs typeface="Arial MT"/>
+              </a:rPr>
+              <a:t> </a:t>
+            </a:r>
+            <a:r>
+              <a:rPr sz="2000" dirty="0">
                 <a:latin typeface="Arial MT"/>
                 <a:cs typeface="Arial MT"/>
               </a:rPr>
               <a:t>header</a:t>
             </a:r>
             <a:r>
-              <a:rPr sz="1800" spc="-15" dirty="0">
-                <a:latin typeface="Arial MT"/>
-                <a:cs typeface="Arial MT"/>
-              </a:rPr>
-              <a:t> </a:t>
-            </a:r>
-            <a:r>
-              <a:rPr sz="1800" spc="-20" dirty="0">
+              <a:rPr sz="2000" spc="-15" dirty="0">
+                <a:latin typeface="Arial MT"/>
+                <a:cs typeface="Arial MT"/>
+              </a:rPr>
+              <a:t> </a:t>
+            </a:r>
+            <a:r>
+              <a:rPr sz="2000" spc="-20" dirty="0">
                 <a:latin typeface="Arial MT"/>
                 <a:cs typeface="Arial MT"/>
               </a:rPr>
               <a:t>file </a:t>
             </a:r>
             <a:r>
-              <a:rPr sz="1800" dirty="0">
+              <a:rPr sz="2000" dirty="0">
                 <a:latin typeface="Arial MT"/>
                 <a:cs typeface="Arial MT"/>
               </a:rPr>
               <a:t>(</a:t>
             </a:r>
             <a:r>
-              <a:rPr sz="1800" b="1" dirty="0">
+              <a:rPr sz="2000" b="1" dirty="0">
                 <a:solidFill>
                   <a:srgbClr val="188037"/>
                 </a:solidFill>
@@ -25388,35 +25984,35 @@
               <a:t>file.h</a:t>
             </a:r>
             <a:r>
-              <a:rPr sz="1800" dirty="0">
+              <a:rPr sz="2000" dirty="0">
                 <a:latin typeface="Arial MT"/>
                 <a:cs typeface="Arial MT"/>
               </a:rPr>
               <a:t>),</a:t>
             </a:r>
             <a:r>
-              <a:rPr sz="1800" spc="-30" dirty="0">
-                <a:latin typeface="Arial MT"/>
-                <a:cs typeface="Arial MT"/>
-              </a:rPr>
-              <a:t> </a:t>
-            </a:r>
-            <a:r>
-              <a:rPr sz="1800" dirty="0">
+              <a:rPr sz="2000" spc="-30" dirty="0">
+                <a:latin typeface="Arial MT"/>
+                <a:cs typeface="Arial MT"/>
+              </a:rPr>
+              <a:t> </a:t>
+            </a:r>
+            <a:r>
+              <a:rPr sz="2000" dirty="0">
                 <a:latin typeface="Arial MT"/>
                 <a:cs typeface="Arial MT"/>
               </a:rPr>
               <a:t>then</a:t>
             </a:r>
             <a:r>
-              <a:rPr sz="1800" spc="-10" dirty="0">
-                <a:latin typeface="Arial MT"/>
-                <a:cs typeface="Arial MT"/>
-              </a:rPr>
-              <a:t> </a:t>
-            </a:r>
-            <a:r>
-              <a:rPr sz="1800" b="1" spc="-10" dirty="0">
+              <a:rPr sz="2000" spc="-10" dirty="0">
+                <a:latin typeface="Arial MT"/>
+                <a:cs typeface="Arial MT"/>
+              </a:rPr>
+              <a:t> </a:t>
+            </a:r>
+            <a:r>
+              <a:rPr sz="2000" b="1" spc="-10" dirty="0">
                 <a:solidFill>
                   <a:srgbClr val="188037"/>
                 </a:solidFill>
@@ -25426,45 +26022,45 @@
               <a:t>file.c</a:t>
             </a:r>
             <a:r>
-              <a:rPr sz="1800" spc="-580" dirty="0">
-                <a:solidFill>
-                  <a:srgbClr val="188037"/>
-                </a:solidFill>
-                <a:latin typeface="Courier New"/>
-                <a:cs typeface="Courier New"/>
-              </a:rPr>
-              <a:t> </a:t>
-            </a:r>
-            <a:r>
-              <a:rPr sz="1800" b="1" dirty="0">
+              <a:rPr sz="2000" spc="-580" dirty="0">
+                <a:solidFill>
+                  <a:srgbClr val="188037"/>
+                </a:solidFill>
+                <a:latin typeface="Courier New"/>
+                <a:cs typeface="Courier New"/>
+              </a:rPr>
+              <a:t> </a:t>
+            </a:r>
+            <a:r>
+              <a:rPr sz="2000" b="1" dirty="0">
                 <a:latin typeface="Arial"/>
                 <a:cs typeface="Arial"/>
               </a:rPr>
               <a:t>depends</a:t>
             </a:r>
             <a:r>
-              <a:rPr sz="1800" b="1" spc="-10" dirty="0">
+              <a:rPr sz="2000" b="1" spc="-10" dirty="0">
                 <a:latin typeface="Arial"/>
                 <a:cs typeface="Arial"/>
               </a:rPr>
               <a:t> </a:t>
             </a:r>
             <a:r>
-              <a:rPr sz="1800" dirty="0">
+              <a:rPr sz="2000" dirty="0">
                 <a:latin typeface="Arial MT"/>
                 <a:cs typeface="Arial MT"/>
               </a:rPr>
               <a:t>on</a:t>
             </a:r>
             <a:r>
-              <a:rPr sz="1800" spc="-15" dirty="0">
-                <a:latin typeface="Arial MT"/>
-                <a:cs typeface="Arial MT"/>
-              </a:rPr>
-              <a:t> </a:t>
-            </a:r>
-            <a:r>
-              <a:rPr sz="1800" b="1" spc="-10" dirty="0" err="1">
+              <a:rPr sz="2000" spc="-15" dirty="0">
+                <a:latin typeface="Arial MT"/>
+                <a:cs typeface="Arial MT"/>
+              </a:rPr>
+              <a:t> </a:t>
+            </a:r>
+            <a:r>
+              <a:rPr sz="2000" b="1" spc="-10" dirty="0" err="1">
                 <a:solidFill>
                   <a:srgbClr val="188037"/>
                 </a:solidFill>
@@ -25474,13 +26070,13 @@
               <a:t>file.h</a:t>
             </a:r>
             <a:r>
-              <a:rPr sz="1800" spc="-10" dirty="0">
+              <a:rPr sz="2000" spc="-10" dirty="0">
                 <a:latin typeface="Arial MT"/>
                 <a:cs typeface="Arial MT"/>
               </a:rPr>
               <a:t>.</a:t>
             </a:r>
-            <a:endParaRPr sz="1800" dirty="0">
+            <a:endParaRPr sz="2000" dirty="0">
               <a:latin typeface="Arial MT"/>
               <a:cs typeface="Arial MT"/>
             </a:endParaRPr>
@@ -25499,21 +26095,21 @@
               </a:tabLst>
             </a:pPr>
             <a:r>
-              <a:rPr sz="1800" dirty="0">
+              <a:rPr sz="2000" dirty="0">
                 <a:latin typeface="Arial MT"/>
                 <a:cs typeface="Arial MT"/>
               </a:rPr>
               <a:t>If</a:t>
             </a:r>
             <a:r>
-              <a:rPr sz="1800" spc="-15" dirty="0">
-                <a:latin typeface="Arial MT"/>
-                <a:cs typeface="Arial MT"/>
-              </a:rPr>
-              <a:t> </a:t>
-            </a:r>
-            <a:r>
-              <a:rPr sz="1800" b="1" spc="-10" dirty="0">
+              <a:rPr sz="2000" spc="-15" dirty="0">
+                <a:latin typeface="Arial MT"/>
+                <a:cs typeface="Arial MT"/>
+              </a:rPr>
+              <a:t> </a:t>
+            </a:r>
+            <a:r>
+              <a:rPr sz="2000" b="1" spc="-10" dirty="0">
                 <a:solidFill>
                   <a:srgbClr val="188037"/>
                 </a:solidFill>
@@ -25523,31 +26119,31 @@
               <a:t>file.h</a:t>
             </a:r>
             <a:r>
-              <a:rPr sz="1800" spc="-585" dirty="0">
-                <a:solidFill>
-                  <a:srgbClr val="188037"/>
-                </a:solidFill>
-                <a:latin typeface="Courier New"/>
-                <a:cs typeface="Courier New"/>
-              </a:rPr>
-              <a:t> </a:t>
-            </a:r>
-            <a:r>
-              <a:rPr sz="1800" dirty="0">
+              <a:rPr sz="2000" spc="-585" dirty="0">
+                <a:solidFill>
+                  <a:srgbClr val="188037"/>
+                </a:solidFill>
+                <a:latin typeface="Courier New"/>
+                <a:cs typeface="Courier New"/>
+              </a:rPr>
+              <a:t> </a:t>
+            </a:r>
+            <a:r>
+              <a:rPr sz="2000" dirty="0">
                 <a:latin typeface="Arial MT"/>
                 <a:cs typeface="Arial MT"/>
               </a:rPr>
               <a:t>changes,</a:t>
             </a:r>
             <a:r>
-              <a:rPr sz="1800" spc="5" dirty="0">
-                <a:latin typeface="Arial MT"/>
-                <a:cs typeface="Arial MT"/>
-              </a:rPr>
-              <a:t> </a:t>
-            </a:r>
-            <a:r>
-              <a:rPr sz="1800" b="1" spc="-10" dirty="0">
+              <a:rPr sz="2000" spc="5" dirty="0">
+                <a:latin typeface="Arial MT"/>
+                <a:cs typeface="Arial MT"/>
+              </a:rPr>
+              <a:t> </a:t>
+            </a:r>
+            <a:r>
+              <a:rPr sz="2000" b="1" spc="-10" dirty="0">
                 <a:solidFill>
                   <a:srgbClr val="188037"/>
                 </a:solidFill>
@@ -25557,100 +26153,100 @@
               <a:t>file.c</a:t>
             </a:r>
             <a:r>
-              <a:rPr sz="1800" spc="-585" dirty="0">
-                <a:solidFill>
-                  <a:srgbClr val="188037"/>
-                </a:solidFill>
-                <a:latin typeface="Courier New"/>
-                <a:cs typeface="Courier New"/>
-              </a:rPr>
-              <a:t> </a:t>
-            </a:r>
-            <a:r>
-              <a:rPr sz="1800" dirty="0">
+              <a:rPr sz="2000" spc="-585" dirty="0">
+                <a:solidFill>
+                  <a:srgbClr val="188037"/>
+                </a:solidFill>
+                <a:latin typeface="Courier New"/>
+                <a:cs typeface="Courier New"/>
+              </a:rPr>
+              <a:t> </a:t>
+            </a:r>
+            <a:r>
+              <a:rPr sz="2000" dirty="0">
                 <a:latin typeface="Arial MT"/>
                 <a:cs typeface="Arial MT"/>
               </a:rPr>
               <a:t>must</a:t>
             </a:r>
             <a:r>
-              <a:rPr sz="1800" spc="-10" dirty="0">
-                <a:latin typeface="Arial MT"/>
-                <a:cs typeface="Arial MT"/>
-              </a:rPr>
-              <a:t> </a:t>
-            </a:r>
-            <a:r>
-              <a:rPr sz="1800" dirty="0">
+              <a:rPr sz="2000" spc="-10" dirty="0">
+                <a:latin typeface="Arial MT"/>
+                <a:cs typeface="Arial MT"/>
+              </a:rPr>
+              <a:t> </a:t>
+            </a:r>
+            <a:r>
+              <a:rPr sz="2000" dirty="0">
                 <a:latin typeface="Arial MT"/>
                 <a:cs typeface="Arial MT"/>
               </a:rPr>
               <a:t>be</a:t>
             </a:r>
             <a:r>
-              <a:rPr sz="1800" spc="-10" dirty="0">
-                <a:latin typeface="Arial MT"/>
-                <a:cs typeface="Arial MT"/>
-              </a:rPr>
-              <a:t> </a:t>
-            </a:r>
-            <a:r>
-              <a:rPr sz="1800" dirty="0">
+              <a:rPr sz="2000" spc="-10" dirty="0">
+                <a:latin typeface="Arial MT"/>
+                <a:cs typeface="Arial MT"/>
+              </a:rPr>
+              <a:t> </a:t>
+            </a:r>
+            <a:r>
+              <a:rPr sz="2000" dirty="0">
                 <a:latin typeface="Arial MT"/>
                 <a:cs typeface="Arial MT"/>
               </a:rPr>
               <a:t>recompiled</a:t>
             </a:r>
             <a:r>
-              <a:rPr sz="1800" spc="-10" dirty="0">
-                <a:latin typeface="Arial MT"/>
-                <a:cs typeface="Arial MT"/>
-              </a:rPr>
-              <a:t> </a:t>
-            </a:r>
-            <a:r>
-              <a:rPr sz="1800" spc="-25" dirty="0">
+              <a:rPr sz="2000" spc="-10" dirty="0">
+                <a:latin typeface="Arial MT"/>
+                <a:cs typeface="Arial MT"/>
+              </a:rPr>
+              <a:t> </a:t>
+            </a:r>
+            <a:r>
+              <a:rPr sz="2000" spc="-25" dirty="0">
                 <a:latin typeface="Arial MT"/>
                 <a:cs typeface="Arial MT"/>
               </a:rPr>
               <a:t>to </a:t>
             </a:r>
             <a:r>
-              <a:rPr sz="1800" dirty="0">
+              <a:rPr sz="2000" dirty="0">
                 <a:latin typeface="Arial MT"/>
                 <a:cs typeface="Arial MT"/>
               </a:rPr>
               <a:t>reflect</a:t>
             </a:r>
             <a:r>
-              <a:rPr sz="1800" spc="-30" dirty="0">
-                <a:latin typeface="Arial MT"/>
-                <a:cs typeface="Arial MT"/>
-              </a:rPr>
-              <a:t> </a:t>
-            </a:r>
-            <a:r>
-              <a:rPr sz="1800" dirty="0">
+              <a:rPr sz="2000" spc="-30" dirty="0">
+                <a:latin typeface="Arial MT"/>
+                <a:cs typeface="Arial MT"/>
+              </a:rPr>
+              <a:t> </a:t>
+            </a:r>
+            <a:r>
+              <a:rPr sz="2000" dirty="0">
                 <a:latin typeface="Arial MT"/>
                 <a:cs typeface="Arial MT"/>
               </a:rPr>
               <a:t>those</a:t>
             </a:r>
             <a:r>
-              <a:rPr sz="1800" spc="-30" dirty="0">
-                <a:latin typeface="Arial MT"/>
-                <a:cs typeface="Arial MT"/>
-              </a:rPr>
-              <a:t> </a:t>
-            </a:r>
-            <a:r>
-              <a:rPr sz="1800" spc="-10" dirty="0">
+              <a:rPr sz="2000" spc="-30" dirty="0">
+                <a:latin typeface="Arial MT"/>
+                <a:cs typeface="Arial MT"/>
+              </a:rPr>
+              <a:t> </a:t>
+            </a:r>
+            <a:r>
+              <a:rPr sz="2000" spc="-10" dirty="0">
                 <a:latin typeface="Arial MT"/>
                 <a:cs typeface="Arial MT"/>
               </a:rPr>
               <a:t>changes.</a:t>
             </a:r>
-            <a:endParaRPr lang="en-US" sz="1800" spc="-10" dirty="0">
+            <a:endParaRPr lang="en-US" sz="2000" spc="-10" dirty="0">
               <a:latin typeface="Arial MT"/>
               <a:cs typeface="Arial MT"/>
             </a:endParaRPr>
@@ -25667,279 +26263,279 @@
               </a:tabLst>
             </a:pPr>
             <a:r>
-              <a:rPr lang="en-US" sz="1800" dirty="0">
+              <a:rPr lang="en-US" sz="2000" dirty="0">
                 <a:latin typeface="Arial MT"/>
                 <a:cs typeface="Arial MT"/>
               </a:rPr>
               <a:t>Dependencies</a:t>
             </a:r>
             <a:r>
-              <a:rPr lang="en-US" sz="1800" spc="-25" dirty="0">
-                <a:latin typeface="Arial MT"/>
-                <a:cs typeface="Arial MT"/>
-              </a:rPr>
-              <a:t> </a:t>
-            </a:r>
-            <a:r>
-              <a:rPr lang="en-US" sz="1800" dirty="0">
+              <a:rPr lang="en-US" sz="2000" spc="-25" dirty="0">
+                <a:latin typeface="Arial MT"/>
+                <a:cs typeface="Arial MT"/>
+              </a:rPr>
+              <a:t> </a:t>
+            </a:r>
+            <a:r>
+              <a:rPr lang="en-US" sz="2000" dirty="0">
                 <a:latin typeface="Arial MT"/>
                 <a:cs typeface="Arial MT"/>
               </a:rPr>
               <a:t>can</a:t>
             </a:r>
             <a:r>
-              <a:rPr lang="en-US" sz="1800" spc="-15" dirty="0">
-                <a:latin typeface="Arial MT"/>
-                <a:cs typeface="Arial MT"/>
-              </a:rPr>
-              <a:t> </a:t>
-            </a:r>
-            <a:r>
-              <a:rPr lang="en-US" sz="1800" dirty="0">
+              <a:rPr lang="en-US" sz="2000" spc="-15" dirty="0">
+                <a:latin typeface="Arial MT"/>
+                <a:cs typeface="Arial MT"/>
+              </a:rPr>
+              <a:t> </a:t>
+            </a:r>
+            <a:r>
+              <a:rPr lang="en-US" sz="2000" dirty="0">
                 <a:latin typeface="Arial MT"/>
                 <a:cs typeface="Arial MT"/>
               </a:rPr>
               <a:t>be</a:t>
             </a:r>
             <a:r>
-              <a:rPr lang="en-US" sz="1800" spc="-10" dirty="0">
-                <a:latin typeface="Arial MT"/>
-                <a:cs typeface="Arial MT"/>
-              </a:rPr>
-              <a:t> </a:t>
-            </a:r>
-            <a:r>
-              <a:rPr lang="en-US" sz="1800" b="1" dirty="0">
+              <a:rPr lang="en-US" sz="2000" spc="-10" dirty="0">
+                <a:latin typeface="Arial MT"/>
+                <a:cs typeface="Arial MT"/>
+              </a:rPr>
+              <a:t> </a:t>
+            </a:r>
+            <a:r>
+              <a:rPr lang="en-US" sz="2000" b="1" dirty="0">
                 <a:latin typeface="Arial"/>
                 <a:cs typeface="Arial"/>
               </a:rPr>
               <a:t>direct</a:t>
             </a:r>
             <a:r>
-              <a:rPr lang="en-US" sz="1800" b="1" spc="-10" dirty="0">
+              <a:rPr lang="en-US" sz="2000" b="1" spc="-10" dirty="0">
                 <a:latin typeface="Arial"/>
                 <a:cs typeface="Arial"/>
               </a:rPr>
               <a:t> </a:t>
             </a:r>
             <a:r>
-              <a:rPr lang="en-US" sz="1800" dirty="0">
+              <a:rPr lang="en-US" sz="2000" dirty="0">
                 <a:latin typeface="Arial MT"/>
                 <a:cs typeface="Arial MT"/>
               </a:rPr>
               <a:t>(when</a:t>
             </a:r>
             <a:r>
-              <a:rPr lang="en-US" sz="1800" spc="-15" dirty="0">
-                <a:latin typeface="Arial MT"/>
-                <a:cs typeface="Arial MT"/>
-              </a:rPr>
-              <a:t> </a:t>
-            </a:r>
-            <a:r>
-              <a:rPr lang="en-US" sz="1800" dirty="0">
+              <a:rPr lang="en-US" sz="2000" spc="-15" dirty="0">
+                <a:latin typeface="Arial MT"/>
+                <a:cs typeface="Arial MT"/>
+              </a:rPr>
+              <a:t> </a:t>
+            </a:r>
+            <a:r>
+              <a:rPr lang="en-US" sz="2000" dirty="0">
                 <a:latin typeface="Arial MT"/>
                 <a:cs typeface="Arial MT"/>
               </a:rPr>
               <a:t>a</a:t>
             </a:r>
             <a:r>
-              <a:rPr lang="en-US" sz="1800" spc="-15" dirty="0">
-                <a:latin typeface="Arial MT"/>
-                <a:cs typeface="Arial MT"/>
-              </a:rPr>
-              <a:t> </a:t>
-            </a:r>
-            <a:r>
-              <a:rPr lang="en-US" sz="1800" dirty="0">
+              <a:rPr lang="en-US" sz="2000" spc="-15" dirty="0">
+                <a:latin typeface="Arial MT"/>
+                <a:cs typeface="Arial MT"/>
+              </a:rPr>
+              <a:t> </a:t>
+            </a:r>
+            <a:r>
+              <a:rPr lang="en-US" sz="2000" dirty="0">
                 <a:latin typeface="Arial MT"/>
                 <a:cs typeface="Arial MT"/>
               </a:rPr>
               <a:t>source</a:t>
             </a:r>
             <a:r>
-              <a:rPr lang="en-US" sz="1800" spc="-10" dirty="0">
-                <a:latin typeface="Arial MT"/>
-                <a:cs typeface="Arial MT"/>
-              </a:rPr>
-              <a:t> </a:t>
-            </a:r>
-            <a:r>
-              <a:rPr lang="en-US" sz="1800" spc="-20" dirty="0">
+              <a:rPr lang="en-US" sz="2000" spc="-10" dirty="0">
+                <a:latin typeface="Arial MT"/>
+                <a:cs typeface="Arial MT"/>
+              </a:rPr>
+              <a:t> </a:t>
+            </a:r>
+            <a:r>
+              <a:rPr lang="en-US" sz="2000" spc="-20" dirty="0">
                 <a:latin typeface="Arial MT"/>
                 <a:cs typeface="Arial MT"/>
               </a:rPr>
               <a:t>file </a:t>
             </a:r>
             <a:r>
-              <a:rPr lang="en-US" sz="1800" dirty="0">
+              <a:rPr lang="en-US" sz="2000" dirty="0">
                 <a:latin typeface="Arial MT"/>
                 <a:cs typeface="Arial MT"/>
               </a:rPr>
               <a:t>directly</a:t>
             </a:r>
             <a:r>
-              <a:rPr lang="en-US" sz="1800" spc="-10" dirty="0">
-                <a:latin typeface="Arial MT"/>
-                <a:cs typeface="Arial MT"/>
-              </a:rPr>
-              <a:t> </a:t>
-            </a:r>
-            <a:r>
-              <a:rPr lang="en-US" sz="1800" dirty="0">
+              <a:rPr lang="en-US" sz="2000" spc="-10" dirty="0">
+                <a:latin typeface="Arial MT"/>
+                <a:cs typeface="Arial MT"/>
+              </a:rPr>
+              <a:t> </a:t>
+            </a:r>
+            <a:r>
+              <a:rPr lang="en-US" sz="2000" dirty="0">
                 <a:latin typeface="Arial MT"/>
                 <a:cs typeface="Arial MT"/>
               </a:rPr>
               <a:t>includes</a:t>
             </a:r>
             <a:r>
-              <a:rPr lang="en-US" sz="1800" spc="-10" dirty="0">
-                <a:latin typeface="Arial MT"/>
-                <a:cs typeface="Arial MT"/>
-              </a:rPr>
-              <a:t> </a:t>
-            </a:r>
-            <a:r>
-              <a:rPr lang="en-US" sz="1800" dirty="0">
+              <a:rPr lang="en-US" sz="2000" spc="-10" dirty="0">
+                <a:latin typeface="Arial MT"/>
+                <a:cs typeface="Arial MT"/>
+              </a:rPr>
+              <a:t> </a:t>
+            </a:r>
+            <a:r>
+              <a:rPr lang="en-US" sz="2000" dirty="0">
                 <a:latin typeface="Arial MT"/>
                 <a:cs typeface="Arial MT"/>
               </a:rPr>
               <a:t>a</a:t>
             </a:r>
             <a:r>
-              <a:rPr lang="en-US" sz="1800" spc="-5" dirty="0">
-                <a:latin typeface="Arial MT"/>
-                <a:cs typeface="Arial MT"/>
-              </a:rPr>
-              <a:t> </a:t>
-            </a:r>
-            <a:r>
-              <a:rPr lang="en-US" sz="1800" dirty="0">
+              <a:rPr lang="en-US" sz="2000" spc="-5" dirty="0">
+                <a:latin typeface="Arial MT"/>
+                <a:cs typeface="Arial MT"/>
+              </a:rPr>
+              <a:t> </a:t>
+            </a:r>
+            <a:r>
+              <a:rPr lang="en-US" sz="2000" dirty="0">
                 <a:latin typeface="Arial MT"/>
                 <a:cs typeface="Arial MT"/>
               </a:rPr>
               <a:t>header)</a:t>
             </a:r>
             <a:r>
-              <a:rPr lang="en-US" sz="1800" spc="-10" dirty="0">
-                <a:latin typeface="Arial MT"/>
-                <a:cs typeface="Arial MT"/>
-              </a:rPr>
-              <a:t> </a:t>
-            </a:r>
-            <a:r>
-              <a:rPr lang="en-US" sz="1800" dirty="0">
+              <a:rPr lang="en-US" sz="2000" spc="-10" dirty="0">
+                <a:latin typeface="Arial MT"/>
+                <a:cs typeface="Arial MT"/>
+              </a:rPr>
+              <a:t> </a:t>
+            </a:r>
+            <a:r>
+              <a:rPr lang="en-US" sz="2000" dirty="0">
                 <a:latin typeface="Arial MT"/>
                 <a:cs typeface="Arial MT"/>
               </a:rPr>
               <a:t>or</a:t>
             </a:r>
             <a:r>
-              <a:rPr lang="en-US" sz="1800" spc="5" dirty="0">
-                <a:latin typeface="Arial MT"/>
-                <a:cs typeface="Arial MT"/>
-              </a:rPr>
-              <a:t> </a:t>
-            </a:r>
-            <a:r>
-              <a:rPr lang="en-US" sz="1800" b="1" dirty="0">
+              <a:rPr lang="en-US" sz="2000" spc="5" dirty="0">
+                <a:latin typeface="Arial MT"/>
+                <a:cs typeface="Arial MT"/>
+              </a:rPr>
+              <a:t> </a:t>
+            </a:r>
+            <a:r>
+              <a:rPr lang="en-US" sz="2000" b="1" dirty="0">
                 <a:latin typeface="Arial"/>
                 <a:cs typeface="Arial"/>
               </a:rPr>
               <a:t>indirect</a:t>
             </a:r>
             <a:r>
-              <a:rPr lang="en-US" sz="1800" b="1" spc="-10" dirty="0">
+              <a:rPr lang="en-US" sz="2000" b="1" spc="-10" dirty="0">
                 <a:latin typeface="Arial"/>
                 <a:cs typeface="Arial"/>
               </a:rPr>
               <a:t> </a:t>
             </a:r>
             <a:r>
-              <a:rPr lang="en-US" sz="1800" dirty="0">
+              <a:rPr lang="en-US" sz="2000" dirty="0">
                 <a:latin typeface="Arial MT"/>
                 <a:cs typeface="Arial MT"/>
               </a:rPr>
               <a:t>(when</a:t>
             </a:r>
             <a:r>
-              <a:rPr lang="en-US" sz="1800" spc="-5" dirty="0">
-                <a:latin typeface="Arial MT"/>
-                <a:cs typeface="Arial MT"/>
-              </a:rPr>
-              <a:t> </a:t>
-            </a:r>
-            <a:r>
-              <a:rPr lang="en-US" sz="1800" spc="-50" dirty="0">
+              <a:rPr lang="en-US" sz="2000" spc="-5" dirty="0">
+                <a:latin typeface="Arial MT"/>
+                <a:cs typeface="Arial MT"/>
+              </a:rPr>
+              <a:t> </a:t>
+            </a:r>
+            <a:r>
+              <a:rPr lang="en-US" sz="2000" spc="-50" dirty="0">
                 <a:latin typeface="Arial MT"/>
                 <a:cs typeface="Arial MT"/>
               </a:rPr>
               <a:t>a </a:t>
             </a:r>
             <a:r>
-              <a:rPr lang="en-US" sz="1800" dirty="0">
+              <a:rPr lang="en-US" sz="2000" dirty="0">
                 <a:latin typeface="Arial MT"/>
                 <a:cs typeface="Arial MT"/>
               </a:rPr>
               <a:t>header</a:t>
             </a:r>
             <a:r>
-              <a:rPr lang="en-US" sz="1800" spc="-20" dirty="0">
-                <a:latin typeface="Arial MT"/>
-                <a:cs typeface="Arial MT"/>
-              </a:rPr>
-              <a:t> </a:t>
-            </a:r>
-            <a:r>
-              <a:rPr lang="en-US" sz="1800" dirty="0">
+              <a:rPr lang="en-US" sz="2000" spc="-20" dirty="0">
+                <a:latin typeface="Arial MT"/>
+                <a:cs typeface="Arial MT"/>
+              </a:rPr>
+              <a:t> </a:t>
+            </a:r>
+            <a:r>
+              <a:rPr lang="en-US" sz="2000" dirty="0">
                 <a:latin typeface="Arial MT"/>
                 <a:cs typeface="Arial MT"/>
               </a:rPr>
               <a:t>file</a:t>
             </a:r>
             <a:r>
-              <a:rPr lang="en-US" sz="1800" spc="-10" dirty="0">
-                <a:latin typeface="Arial MT"/>
-                <a:cs typeface="Arial MT"/>
-              </a:rPr>
-              <a:t> </a:t>
-            </a:r>
-            <a:r>
-              <a:rPr lang="en-US" sz="1800" dirty="0">
+              <a:rPr lang="en-US" sz="2000" spc="-10" dirty="0">
+                <a:latin typeface="Arial MT"/>
+                <a:cs typeface="Arial MT"/>
+              </a:rPr>
+              <a:t> </a:t>
+            </a:r>
+            <a:r>
+              <a:rPr lang="en-US" sz="2000" dirty="0">
                 <a:latin typeface="Arial MT"/>
                 <a:cs typeface="Arial MT"/>
               </a:rPr>
               <a:t>includes</a:t>
             </a:r>
             <a:r>
-              <a:rPr lang="en-US" sz="1800" spc="-10" dirty="0">
-                <a:latin typeface="Arial MT"/>
-                <a:cs typeface="Arial MT"/>
-              </a:rPr>
-              <a:t> </a:t>
-            </a:r>
-            <a:r>
-              <a:rPr lang="en-US" sz="1800" dirty="0">
+              <a:rPr lang="en-US" sz="2000" spc="-10" dirty="0">
+                <a:latin typeface="Arial MT"/>
+                <a:cs typeface="Arial MT"/>
+              </a:rPr>
+              <a:t> </a:t>
+            </a:r>
+            <a:r>
+              <a:rPr lang="en-US" sz="2000" dirty="0">
                 <a:latin typeface="Arial MT"/>
                 <a:cs typeface="Arial MT"/>
               </a:rPr>
               <a:t>another</a:t>
             </a:r>
             <a:r>
-              <a:rPr lang="en-US" sz="1800" spc="-5" dirty="0">
-                <a:latin typeface="Arial MT"/>
-                <a:cs typeface="Arial MT"/>
-              </a:rPr>
-              <a:t> </a:t>
-            </a:r>
-            <a:r>
-              <a:rPr lang="en-US" sz="1800" spc="-10" dirty="0">
+              <a:rPr lang="en-US" sz="2000" spc="-5" dirty="0">
+                <a:latin typeface="Arial MT"/>
+                <a:cs typeface="Arial MT"/>
+              </a:rPr>
+              <a:t> </a:t>
+            </a:r>
+            <a:r>
+              <a:rPr lang="en-US" sz="2000" spc="-10" dirty="0">
                 <a:latin typeface="Arial MT"/>
                 <a:cs typeface="Arial MT"/>
               </a:rPr>
               <a:t>header).</a:t>
             </a:r>
-            <a:endParaRPr lang="en-US" sz="1800" dirty="0">
+            <a:endParaRPr lang="en-US" sz="2000" dirty="0">
               <a:latin typeface="Arial MT"/>
               <a:cs typeface="Arial MT"/>
             </a:endParaRPr>
@@ -28538,6 +29134,321 @@
 </a:theme>
 </file>
 
+<file path=ppt/theme/theme2.xml><?xml version="1.0" encoding="utf-8"?>
+<a:theme xmlns:a="http://schemas.openxmlformats.org/drawingml/2006/main" name="Office Theme">
+  <a:themeElements>
+    <a:clrScheme name="Office">
+      <a:dk1>
+        <a:sysClr val="windowText" lastClr="000000"/>
+      </a:dk1>
+      <a:lt1>
+        <a:sysClr val="window" lastClr="FFFFFF"/>
+      </a:lt1>
+      <a:dk2>
+        <a:srgbClr val="0E2841"/>
+      </a:dk2>
+      <a:lt2>
+        <a:srgbClr val="E8E8E8"/>
+      </a:lt2>
+      <a:accent1>
+        <a:srgbClr val="156082"/>
+      </a:accent1>
+      <a:accent2>
+        <a:srgbClr val="E97132"/>
+      </a:accent2>
+      <a:accent3>
+        <a:srgbClr val="196B24"/>
+      </a:accent3>
+      <a:accent4>
+        <a:srgbClr val="0F9ED5"/>
+      </a:accent4>
+      <a:accent5>
+        <a:srgbClr val="A02B93"/>
+      </a:accent5>
+      <a:accent6>
+        <a:srgbClr val="4EA72E"/>
+      </a:accent6>
+      <a:hlink>
+        <a:srgbClr val="467886"/>
+      </a:hlink>
+      <a:folHlink>
+        <a:srgbClr val="96607D"/>
+      </a:folHlink>
+    </a:clrScheme>
+    <a:fontScheme name="Office">
+      <a:majorFont>
+        <a:latin typeface="Aptos Display" panose="02110004020202020204"/>
+        <a:ea typeface=""/>
+        <a:cs typeface=""/>
+        <a:font script="Jpan" typeface="游ゴシック Light"/>
+        <a:font script="Hang" typeface="맑은 고딕"/>
+        <a:font script="Hans" typeface="等线 Light"/>
+        <a:font script="Hant" typeface="新細明體"/>
+        <a:font script="Arab" typeface="Times New Roman"/>
+        <a:font script="Hebr" typeface="Times New Roman"/>
+        <a:font script="Thai" typeface="Angsana New"/>
+        <a:font script="Ethi" typeface="Nyala"/>
+        <a:font script="Beng" typeface="Vrinda"/>
+        <a:font script="Gujr" typeface="Shruti"/>
+        <a:font script="Khmr" typeface="MoolBoran"/>
+        <a:font script="Knda" typeface="Tunga"/>
+        <a:font script="Guru" typeface="Raavi"/>
+        <a:font script="Cans" typeface="Euphemia"/>
+        <a:font script="Cher" typeface="Plantagenet Cherokee"/>
+        <a:font script="Yiii" typeface="Microsoft Yi Baiti"/>
+        <a:font script="Tibt" typeface="Microsoft Himalaya"/>
+        <a:font script="Thaa" typeface="MV Boli"/>
+        <a:font script="Deva" typeface="Mangal"/>
+        <a:font script="Telu" typeface="Gautami"/>
+        <a:font script="Taml" typeface="Latha"/>
+        <a:font script="Syrc" typeface="Estrangelo Edessa"/>
+        <a:font script="Orya" typeface="Kalinga"/>
+        <a:font script="Mlym" typeface="Kartika"/>
+        <a:font script="Laoo" typeface="DokChampa"/>
+        <a:font script="Sinh" typeface="Iskoola Pota"/>
+        <a:font script="Mong" typeface="Mongolian Baiti"/>
+        <a:font script="Viet" typeface="Times New Roman"/>
+        <a:font script="Uigh" typeface="Microsoft Uighur"/>
+        <a:font script="Geor" typeface="Sylfaen"/>
+        <a:font script="Armn" typeface="Arial"/>
+        <a:font script="Bugi" typeface="Leelawadee UI"/>
+        <a:font script="Bopo" typeface="Microsoft JhengHei"/>
+        <a:font script="Java" typeface="Javanese Text"/>
+        <a:font script="Lisu" typeface="Segoe UI"/>
+        <a:font script="Mymr" typeface="Myanmar Text"/>
+        <a:font script="Nkoo" typeface="Ebrima"/>
+        <a:font script="Olck" typeface="Nirmala UI"/>
+        <a:font script="Osma" typeface="Ebrima"/>
+        <a:font script="Phag" typeface="Phagspa"/>
+        <a:font script="Syrn" typeface="Estrangelo Edessa"/>
+        <a:font script="Syrj" typeface="Estrangelo Edessa"/>
+        <a:font script="Syre" typeface="Estrangelo Edessa"/>
+        <a:font script="Sora" typeface="Nirmala UI"/>
+        <a:font script="Tale" typeface="Microsoft Tai Le"/>
+        <a:font script="Talu" typeface="Microsoft New Tai Lue"/>
+        <a:font script="Tfng" typeface="Ebrima"/>
+      </a:majorFont>
+      <a:minorFont>
+        <a:latin typeface="Aptos" panose="02110004020202020204"/>
+        <a:ea typeface=""/>
+        <a:cs typeface=""/>
+        <a:font script="Jpan" typeface="游ゴシック"/>
+        <a:font script="Hang" typeface="맑은 고딕"/>
+        <a:font script="Hans" typeface="等线"/>
+        <a:font script="Hant" typeface="新細明體"/>
+        <a:font script="Arab" typeface="Arial"/>
+        <a:font script="Hebr" typeface="Arial"/>
+        <a:font script="Thai" typeface="Cordia New"/>
+        <a:font script="Ethi" typeface="Nyala"/>
+        <a:font script="Beng" typeface="Vrinda"/>
+        <a:font script="Gujr" typeface="Shruti"/>
+        <a:font script="Khmr" typeface="DaunPenh"/>
+        <a:font script="Knda" typeface="Tunga"/>
+        <a:font script="Guru" typeface="Raavi"/>
+        <a:font script="Cans" typeface="Euphemia"/>
+        <a:font script="Cher" typeface="Plantagenet Cherokee"/>
+        <a:font script="Yiii" typeface="Microsoft Yi Baiti"/>
+        <a:font script="Tibt" typeface="Microsoft Himalaya"/>
+        <a:font script="Thaa" typeface="MV Boli"/>
+        <a:font script="Deva" typeface="Mangal"/>
+        <a:font script="Telu" typeface="Gautami"/>
+        <a:font script="Taml" typeface="Latha"/>
+        <a:font script="Syrc" typeface="Estrangelo Edessa"/>
+        <a:font script="Orya" typeface="Kalinga"/>
+        <a:font script="Mlym" typeface="Kartika"/>
+        <a:font script="Laoo" typeface="DokChampa"/>
+        <a:font script="Sinh" typeface="Iskoola Pota"/>
+        <a:font script="Mong" typeface="Mongolian Baiti"/>
+        <a:font script="Viet" typeface="Arial"/>
+        <a:font script="Uigh" typeface="Microsoft Uighur"/>
+        <a:font script="Geor" typeface="Sylfaen"/>
+        <a:font script="Armn" typeface="Arial"/>
+        <a:font script="Bugi" typeface="Leelawadee UI"/>
+        <a:font script="Bopo" typeface="Microsoft JhengHei"/>
+        <a:font script="Java" typeface="Javanese Text"/>
+        <a:font script="Lisu" typeface="Segoe UI"/>
+        <a:font script="Mymr" typeface="Myanmar Text"/>
+        <a:font script="Nkoo" typeface="Ebrima"/>
+        <a:font script="Olck" typeface="Nirmala UI"/>
+        <a:font script="Osma" typeface="Ebrima"/>
+        <a:font script="Phag" typeface="Phagspa"/>
+        <a:font script="Syrn" typeface="Estrangelo Edessa"/>
+        <a:font script="Syrj" typeface="Estrangelo Edessa"/>
+        <a:font script="Syre" typeface="Estrangelo Edessa"/>
+        <a:font script="Sora" typeface="Nirmala UI"/>
+        <a:font script="Tale" typeface="Microsoft Tai Le"/>
+        <a:font script="Talu" typeface="Microsoft New Tai Lue"/>
+        <a:font script="Tfng" typeface="Ebrima"/>
+      </a:minorFont>
+    </a:fontScheme>
+    <a:fmtScheme name="Office">
+      <a:fillStyleLst>
+        <a:solidFill>
+          <a:schemeClr val="phClr"/>
+        </a:solidFill>
+        <a:gradFill rotWithShape="1">
+          <a:gsLst>
+            <a:gs pos="0">
+              <a:schemeClr val="phClr">
+                <a:lumMod val="110000"/>
+                <a:satMod val="105000"/>
+                <a:tint val="67000"/>
+              </a:schemeClr>
+            </a:gs>
+            <a:gs pos="50000">
+              <a:schemeClr val="phClr">
+                <a:lumMod val="105000"/>
+                <a:satMod val="103000"/>
+                <a:tint val="73000"/>
+              </a:schemeClr>
+            </a:gs>
+            <a:gs pos="100000">
+              <a:schemeClr val="phClr">
+                <a:lumMod val="105000"/>
+                <a:satMod val="109000"/>
+                <a:tint val="81000"/>
+              </a:schemeClr>
+            </a:gs>
+          </a:gsLst>
+          <a:lin ang="5400000" scaled="0"/>
+        </a:gradFill>
+        <a:gradFill rotWithShape="1">
+          <a:gsLst>
+            <a:gs pos="0">
+              <a:schemeClr val="phClr">
+                <a:satMod val="103000"/>
+                <a:lumMod val="102000"/>
+                <a:tint val="94000"/>
+              </a:schemeClr>
+            </a:gs>
+            <a:gs pos="50000">
+              <a:schemeClr val="phClr">
+                <a:satMod val="110000"/>
+                <a:lumMod val="100000"/>
+                <a:shade val="100000"/>
+              </a:schemeClr>
+            </a:gs>
+            <a:gs pos="100000">
+              <a:schemeClr val="phClr">
+                <a:lumMod val="99000"/>
+                <a:satMod val="120000"/>
+                <a:shade val="78000"/>
+              </a:schemeClr>
+            </a:gs>
+          </a:gsLst>
+          <a:lin ang="5400000" scaled="0"/>
+        </a:gradFill>
+      </a:fillStyleLst>
+      <a:lnStyleLst>
+        <a:ln w="12700" cap="flat" cmpd="sng" algn="ctr">
+          <a:solidFill>
+            <a:schemeClr val="phClr"/>
+          </a:solidFill>
+          <a:prstDash val="solid"/>
+          <a:miter lim="800000"/>
+        </a:ln>
+        <a:ln w="19050" cap="flat" cmpd="sng" algn="ctr">
+          <a:solidFill>
+            <a:schemeClr val="phClr"/>
+          </a:solidFill>
+          <a:prstDash val="solid"/>
+          <a:miter lim="800000"/>
+        </a:ln>
+        <a:ln w="25400" cap="flat" cmpd="sng" algn="ctr">
+          <a:solidFill>
+            <a:schemeClr val="phClr"/>
+          </a:solidFill>
+          <a:prstDash val="solid"/>
+          <a:miter lim="800000"/>
+        </a:ln>
+      </a:lnStyleLst>
+      <a:effectStyleLst>
+        <a:effectStyle>
+          <a:effectLst/>
+        </a:effectStyle>
+        <a:effectStyle>
+          <a:effectLst/>
+        </a:effectStyle>
+        <a:effectStyle>
+          <a:effectLst>
+            <a:outerShdw blurRad="57150" dist="19050" dir="5400000" algn="ctr" rotWithShape="0">
+              <a:srgbClr val="000000">
+                <a:alpha val="63000"/>
+              </a:srgbClr>
+            </a:outerShdw>
+          </a:effectLst>
+        </a:effectStyle>
+      </a:effectStyleLst>
+      <a:bgFillStyleLst>
+        <a:solidFill>
+          <a:schemeClr val="phClr"/>
+        </a:solidFill>
+        <a:solidFill>
+          <a:schemeClr val="phClr">
+            <a:tint val="95000"/>
+            <a:satMod val="170000"/>
+          </a:schemeClr>
+        </a:solidFill>
+        <a:gradFill rotWithShape="1">
+          <a:gsLst>
+            <a:gs pos="0">
+              <a:schemeClr val="phClr">
+                <a:tint val="93000"/>
+                <a:satMod val="150000"/>
+                <a:shade val="98000"/>
+                <a:lumMod val="102000"/>
+              </a:schemeClr>
+            </a:gs>
+            <a:gs pos="50000">
+              <a:schemeClr val="phClr">
+                <a:tint val="98000"/>
+                <a:satMod val="130000"/>
+                <a:shade val="90000"/>
+                <a:lumMod val="103000"/>
+              </a:schemeClr>
+            </a:gs>
+            <a:gs pos="100000">
+              <a:schemeClr val="phClr">
+                <a:shade val="63000"/>
+                <a:satMod val="120000"/>
+              </a:schemeClr>
+            </a:gs>
+          </a:gsLst>
+          <a:lin ang="5400000" scaled="0"/>
+        </a:gradFill>
+      </a:bgFillStyleLst>
+    </a:fmtScheme>
+  </a:themeElements>
+  <a:objectDefaults>
+    <a:lnDef>
+      <a:spPr/>
+      <a:bodyPr/>
+      <a:lstStyle/>
+      <a:style>
+        <a:lnRef idx="2">
+          <a:schemeClr val="accent1"/>
+        </a:lnRef>
+        <a:fillRef idx="0">
+          <a:schemeClr val="accent1"/>
+        </a:fillRef>
+        <a:effectRef idx="1">
+          <a:schemeClr val="accent1"/>
+        </a:effectRef>
+        <a:fontRef idx="minor">
+          <a:schemeClr val="tx1"/>
+        </a:fontRef>
+      </a:style>
+    </a:lnDef>
+  </a:objectDefaults>
+  <a:extraClrSchemeLst/>
+  <a:extLst>
+    <a:ext uri="{05A4C25C-085E-4340-85A3-A5531E510DB2}">
+      <thm15:themeFamily xmlns:thm15="http://schemas.microsoft.com/office/thememl/2012/main" name="Office Theme" id="{2E142A2C-CD16-42D6-873A-C26D2A0506FA}" vid="{1BDDFF52-6CD6-40A5-AB3C-68EB2F1E4D0A}"/>
+    </a:ext>
+  </a:extLst>
+</a:theme>
+</file>
+
 <file path=docMetadata/LabelInfo.xml><?xml version="1.0" encoding="utf-8"?>
 <clbl:labelList xmlns:clbl="http://schemas.microsoft.com/office/2020/mipLabelMetadata">
   <clbl:label id="{a2761ec8-7198-4440-bea0-e9dd2af28b51}" enabled="1" method="Standard" siteId="{73e15cf5-5dbb-46af-a862-753916269d73}" contentBits="0" removed="0"/>
